--- a/運用/スライド/勉強会_202609.pptx
+++ b/運用/スライド/勉強会_202609.pptx
@@ -1045,7 +1045,7 @@
           <a:p>
             <a:r>
               <a:rPr lang="en-US" dirty="0"/>
-              <a:t>その場で申し込みを迫らない。URLをチャットに貼って終わりにする。合わなければ見送ってくださって結構です、と必ず言う。</a:t>
+              <a:t>チャットに貼るのは【説明会】と【個別相談】のURLだけ。講座の申込ページ（受講料が出る）は貼らないこと。この会では金額に触れない。その場で申し込みを迫らない。「合わなければ見送ってくださって結構です」を必ず口に出す。</a:t>
             </a:r>
             <a:endParaRPr lang="en-US" dirty="0"/>
           </a:p>
